--- a/Reporte 250526.pptx
+++ b/Reporte 250526.pptx
@@ -6294,10 +6294,10 @@
       </p:sp>
       <p:pic>
         <p:nvPicPr>
-          <p:cNvPr id="4" name="Imagen 3">
+          <p:cNvPr id="3" name="Imagen 2">
             <a:extLst>
               <a:ext uri="{FF2B5EF4-FFF2-40B4-BE49-F238E27FC236}">
-                <a16:creationId xmlns:a16="http://schemas.microsoft.com/office/drawing/2014/main" id="{7095C627-C188-9541-3CA9-CB99DACF4112}"/>
+                <a16:creationId xmlns:a16="http://schemas.microsoft.com/office/drawing/2014/main" id="{6EF6A18D-F572-59B9-6C7A-62D1836B0210}"/>
               </a:ext>
             </a:extLst>
           </p:cNvPr>
@@ -6314,8 +6314,8 @@
         </p:blipFill>
         <p:spPr>
           <a:xfrm>
-            <a:off x="0" y="923082"/>
-            <a:ext cx="9144000" cy="3297335"/>
+            <a:off x="0" y="1157984"/>
+            <a:ext cx="9144000" cy="2970408"/>
           </a:xfrm>
           <a:prstGeom prst="rect">
             <a:avLst/>
@@ -6398,10 +6398,10 @@
       </p:sp>
       <p:pic>
         <p:nvPicPr>
-          <p:cNvPr id="3" name="Imagen 2">
+          <p:cNvPr id="4" name="Imagen 3">
             <a:extLst>
               <a:ext uri="{FF2B5EF4-FFF2-40B4-BE49-F238E27FC236}">
-                <a16:creationId xmlns:a16="http://schemas.microsoft.com/office/drawing/2014/main" id="{C2B07F8C-FDF8-2A0B-AAB4-DA59922AD2C6}"/>
+                <a16:creationId xmlns:a16="http://schemas.microsoft.com/office/drawing/2014/main" id="{E94C1190-FDE4-6D4A-D9D9-D20ACDBB3325}"/>
               </a:ext>
             </a:extLst>
           </p:cNvPr>
@@ -6418,8 +6418,8 @@
         </p:blipFill>
         <p:spPr>
           <a:xfrm>
-            <a:off x="0" y="490021"/>
-            <a:ext cx="9144000" cy="4306333"/>
+            <a:off x="0" y="462696"/>
+            <a:ext cx="9144000" cy="4360984"/>
           </a:xfrm>
           <a:prstGeom prst="rect">
             <a:avLst/>
@@ -6496,10 +6496,10 @@
       </p:sp>
       <p:pic>
         <p:nvPicPr>
-          <p:cNvPr id="5" name="Imagen 4">
+          <p:cNvPr id="4" name="Imagen 3">
             <a:extLst>
               <a:ext uri="{FF2B5EF4-FFF2-40B4-BE49-F238E27FC236}">
-                <a16:creationId xmlns:a16="http://schemas.microsoft.com/office/drawing/2014/main" id="{37944D54-F589-9B84-6DDF-3D6DE47FF307}"/>
+                <a16:creationId xmlns:a16="http://schemas.microsoft.com/office/drawing/2014/main" id="{E7A1B0E5-3C7A-143C-C740-63E6B84FD810}"/>
               </a:ext>
             </a:extLst>
           </p:cNvPr>
@@ -6516,8 +6516,8 @@
         </p:blipFill>
         <p:spPr>
           <a:xfrm>
-            <a:off x="0" y="1048304"/>
-            <a:ext cx="9144000" cy="3189768"/>
+            <a:off x="0" y="1097404"/>
+            <a:ext cx="9144000" cy="3091567"/>
           </a:xfrm>
           <a:prstGeom prst="rect">
             <a:avLst/>
@@ -6594,10 +6594,10 @@
       </p:sp>
       <p:pic>
         <p:nvPicPr>
-          <p:cNvPr id="3" name="Imagen 2">
+          <p:cNvPr id="4" name="Imagen 3">
             <a:extLst>
               <a:ext uri="{FF2B5EF4-FFF2-40B4-BE49-F238E27FC236}">
-                <a16:creationId xmlns:a16="http://schemas.microsoft.com/office/drawing/2014/main" id="{BA4FB61B-2833-D781-8A7C-97C86660960B}"/>
+                <a16:creationId xmlns:a16="http://schemas.microsoft.com/office/drawing/2014/main" id="{29BFA30F-8B3A-944A-4770-E57102F97776}"/>
               </a:ext>
             </a:extLst>
           </p:cNvPr>
@@ -6614,8 +6614,8 @@
         </p:blipFill>
         <p:spPr>
           <a:xfrm>
-            <a:off x="0" y="1355765"/>
-            <a:ext cx="9144000" cy="2431969"/>
+            <a:off x="0" y="459886"/>
+            <a:ext cx="9144000" cy="4366603"/>
           </a:xfrm>
           <a:prstGeom prst="rect">
             <a:avLst/>
@@ -6698,10 +6698,10 @@
       </p:sp>
       <p:pic>
         <p:nvPicPr>
-          <p:cNvPr id="4" name="Imagen 3">
+          <p:cNvPr id="3" name="Imagen 2">
             <a:extLst>
               <a:ext uri="{FF2B5EF4-FFF2-40B4-BE49-F238E27FC236}">
-                <a16:creationId xmlns:a16="http://schemas.microsoft.com/office/drawing/2014/main" id="{278F5DAC-5985-EB5E-1A85-176F40E0E9FE}"/>
+                <a16:creationId xmlns:a16="http://schemas.microsoft.com/office/drawing/2014/main" id="{5B6F5D09-DDDF-D1A0-815B-7E338948B849}"/>
               </a:ext>
             </a:extLst>
           </p:cNvPr>
@@ -6718,8 +6718,8 @@
         </p:blipFill>
         <p:spPr>
           <a:xfrm>
-            <a:off x="0" y="395912"/>
-            <a:ext cx="9144000" cy="4419769"/>
+            <a:off x="0" y="1517453"/>
+            <a:ext cx="9144000" cy="2108594"/>
           </a:xfrm>
           <a:prstGeom prst="rect">
             <a:avLst/>
@@ -6796,10 +6796,10 @@
       </p:sp>
       <p:pic>
         <p:nvPicPr>
-          <p:cNvPr id="3" name="Imagen 2">
+          <p:cNvPr id="5" name="Imagen 4">
             <a:extLst>
               <a:ext uri="{FF2B5EF4-FFF2-40B4-BE49-F238E27FC236}">
-                <a16:creationId xmlns:a16="http://schemas.microsoft.com/office/drawing/2014/main" id="{BA58F4C4-21BA-DF1B-0429-6D2666521540}"/>
+                <a16:creationId xmlns:a16="http://schemas.microsoft.com/office/drawing/2014/main" id="{BD30E29A-6825-7627-6C32-908BE6F711F9}"/>
               </a:ext>
             </a:extLst>
           </p:cNvPr>
@@ -6816,8 +6816,8 @@
         </p:blipFill>
         <p:spPr>
           <a:xfrm>
-            <a:off x="0" y="729327"/>
-            <a:ext cx="9144000" cy="3827721"/>
+            <a:off x="0" y="861018"/>
+            <a:ext cx="9144000" cy="3421463"/>
           </a:xfrm>
           <a:prstGeom prst="rect">
             <a:avLst/>
@@ -7750,10 +7750,10 @@
       </p:sp>
       <p:pic>
         <p:nvPicPr>
-          <p:cNvPr id="4" name="Imagen 3">
+          <p:cNvPr id="5" name="Imagen 4">
             <a:extLst>
               <a:ext uri="{FF2B5EF4-FFF2-40B4-BE49-F238E27FC236}">
-                <a16:creationId xmlns:a16="http://schemas.microsoft.com/office/drawing/2014/main" id="{C519BA72-2701-F890-7AA0-077A8280DCCB}"/>
+                <a16:creationId xmlns:a16="http://schemas.microsoft.com/office/drawing/2014/main" id="{D6845FE9-8A0F-513E-8288-497210BE9827}"/>
               </a:ext>
             </a:extLst>
           </p:cNvPr>
@@ -7770,8 +7770,8 @@
         </p:blipFill>
         <p:spPr>
           <a:xfrm>
-            <a:off x="0" y="377088"/>
-            <a:ext cx="9144000" cy="4389323"/>
+            <a:off x="0" y="696643"/>
+            <a:ext cx="9144000" cy="3893089"/>
           </a:xfrm>
           <a:prstGeom prst="rect">
             <a:avLst/>
